--- a/第3章-面向对象程序设计/第3章-面向对象程序设计.pptx
+++ b/第3章-面向对象程序设计/第3章-面向对象程序设计.pptx
@@ -6,10 +6,10 @@
     <p:sldMasterId id="2147484986" r:id="rId2"/>
   </p:sldMasterIdLst>
   <p:notesMasterIdLst>
-    <p:notesMasterId r:id="rId27"/>
+    <p:notesMasterId r:id="rId26"/>
   </p:notesMasterIdLst>
   <p:handoutMasterIdLst>
-    <p:handoutMasterId r:id="rId28"/>
+    <p:handoutMasterId r:id="rId27"/>
   </p:handoutMasterIdLst>
   <p:sldIdLst>
     <p:sldId id="2708" r:id="rId3"/>
@@ -35,12 +35,11 @@
     <p:sldId id="2784" r:id="rId23"/>
     <p:sldId id="2779" r:id="rId24"/>
     <p:sldId id="2741" r:id="rId25"/>
-    <p:sldId id="2792" r:id="rId26"/>
   </p:sldIdLst>
   <p:sldSz cx="12192000" cy="6858000"/>
   <p:notesSz cx="7099300" cy="10234613"/>
   <p:custDataLst>
-    <p:tags r:id="rId29"/>
+    <p:tags r:id="rId28"/>
   </p:custDataLst>
   <p:defaultTextStyle>
     <a:defPPr>
@@ -918,7 +917,7 @@
               </a14:hiddenFill>
             </a:ext>
             <a:ext uri="{FAA26D3D-D897-4be2-8F04-BA451C77F1D7}">
-              <ma14:placeholderFlag xmlns="" xmlns:ma14="http://schemas.microsoft.com/office/mac/drawingml/2011/main" val="1"/>
+              <ma14:placeholderFlag xmlns:ma14="http://schemas.microsoft.com/office/mac/drawingml/2011/main" xmlns="" val="1"/>
             </a:ext>
           </a:extLst>
         </p:spPr>
@@ -1306,7 +1305,7 @@
               </a14:hiddenLine>
             </a:ext>
             <a:ext uri="{FAA26D3D-D897-4be2-8F04-BA451C77F1D7}">
-              <ma14:placeholderFlag xmlns="" xmlns:ma14="http://schemas.microsoft.com/office/mac/drawingml/2011/main" val="1"/>
+              <ma14:placeholderFlag xmlns:ma14="http://schemas.microsoft.com/office/mac/drawingml/2011/main" xmlns="" val="1"/>
             </a:ext>
           </a:extLst>
         </p:spPr>
@@ -1993,7 +1992,7 @@
           <a:bodyPr/>
           <a:lstStyle/>
           <a:p>
-            <a:endParaRPr lang="zh-CN" altLang="en-US"/>
+            <a:endParaRPr lang="zh-CN" altLang="en-US" dirty="0"/>
           </a:p>
         </p:txBody>
       </p:sp>
@@ -2767,85 +2766,6 @@
 </p:notes>
 </file>
 
-<file path=ppt/notesSlides/notesSlide24.xml><?xml version="1.0" encoding="utf-8"?>
-<p:notes xmlns:a="http://schemas.openxmlformats.org/drawingml/2006/main" xmlns:r="http://schemas.openxmlformats.org/officeDocument/2006/relationships" xmlns:p="http://schemas.openxmlformats.org/presentationml/2006/main">
-  <p:cSld>
-    <p:spTree>
-      <p:nvGrpSpPr>
-        <p:cNvPr id="1" name="">
-          <a:extLst>
-            <a:ext uri="{FF2B5EF4-FFF2-40B4-BE49-F238E27FC236}">
-              <a16:creationId xmlns:a16="http://schemas.microsoft.com/office/drawing/2014/main" id="{3B794A81-9685-5767-7DB3-C948D02C23C0}"/>
-            </a:ext>
-          </a:extLst>
-        </p:cNvPr>
-        <p:cNvGrpSpPr/>
-        <p:nvPr/>
-      </p:nvGrpSpPr>
-      <p:grpSpPr>
-        <a:xfrm>
-          <a:off x="0" y="0"/>
-          <a:ext cx="0" cy="0"/>
-          <a:chOff x="0" y="0"/>
-          <a:chExt cx="0" cy="0"/>
-        </a:xfrm>
-      </p:grpSpPr>
-      <p:sp>
-        <p:nvSpPr>
-          <p:cNvPr id="2" name="幻灯片图像占位符 1">
-            <a:extLst>
-              <a:ext uri="{FF2B5EF4-FFF2-40B4-BE49-F238E27FC236}">
-                <a16:creationId xmlns:a16="http://schemas.microsoft.com/office/drawing/2014/main" id="{FAB083EB-70EF-41EA-D01D-CB18E2F9E8C7}"/>
-              </a:ext>
-            </a:extLst>
-          </p:cNvPr>
-          <p:cNvSpPr>
-            <a:spLocks noGrp="1" noRot="1" noChangeAspect="1"/>
-          </p:cNvSpPr>
-          <p:nvPr>
-            <p:ph type="sldImg"/>
-          </p:nvPr>
-        </p:nvSpPr>
-        <p:spPr/>
-      </p:sp>
-      <p:sp>
-        <p:nvSpPr>
-          <p:cNvPr id="3" name="备注占位符 2">
-            <a:extLst>
-              <a:ext uri="{FF2B5EF4-FFF2-40B4-BE49-F238E27FC236}">
-                <a16:creationId xmlns:a16="http://schemas.microsoft.com/office/drawing/2014/main" id="{DF072144-D10E-E296-B1B7-0860B07E8A7E}"/>
-              </a:ext>
-            </a:extLst>
-          </p:cNvPr>
-          <p:cNvSpPr>
-            <a:spLocks noGrp="1"/>
-          </p:cNvSpPr>
-          <p:nvPr>
-            <p:ph type="body" idx="1"/>
-          </p:nvPr>
-        </p:nvSpPr>
-        <p:spPr/>
-        <p:txBody>
-          <a:bodyPr/>
-          <a:lstStyle/>
-          <a:p>
-            <a:endParaRPr lang="zh-CN" altLang="en-US" dirty="0"/>
-          </a:p>
-        </p:txBody>
-      </p:sp>
-    </p:spTree>
-    <p:extLst>
-      <p:ext uri="{BB962C8B-B14F-4D97-AF65-F5344CB8AC3E}">
-        <p14:creationId xmlns:p14="http://schemas.microsoft.com/office/powerpoint/2010/main" val="3331454868"/>
-      </p:ext>
-    </p:extLst>
-  </p:cSld>
-  <p:clrMapOvr>
-    <a:masterClrMapping/>
-  </p:clrMapOvr>
-</p:notes>
-</file>
-
 <file path=ppt/notesSlides/notesSlide3.xml><?xml version="1.0" encoding="utf-8"?>
 <p:notes xmlns:a="http://schemas.openxmlformats.org/drawingml/2006/main" xmlns:r="http://schemas.openxmlformats.org/officeDocument/2006/relationships" xmlns:p="http://schemas.openxmlformats.org/presentationml/2006/main">
   <p:cSld>
@@ -3103,7 +3023,29 @@
           <a:bodyPr/>
           <a:lstStyle/>
           <a:p>
-            <a:endParaRPr lang="zh-CN" altLang="en-US"/>
+            <a:r>
+              <a:rPr lang="en-US" altLang="zh-CN" dirty="0"/>
+              <a:t>__</a:t>
+            </a:r>
+            <a:r>
+              <a:rPr lang="en-US" altLang="zh-CN" dirty="0" err="1"/>
+              <a:t>init</a:t>
+            </a:r>
+            <a:r>
+              <a:rPr lang="en-US" altLang="zh-CN" dirty="0"/>
+              <a:t>__()</a:t>
+            </a:r>
+            <a:r>
+              <a:rPr lang="zh-CN" altLang="en-US" dirty="0"/>
+              <a:t>：初始化方法</a:t>
+            </a:r>
+            <a:endParaRPr lang="en-US" altLang="zh-CN" dirty="0"/>
+          </a:p>
+          <a:p>
+            <a:endParaRPr lang="en-US" altLang="zh-CN" dirty="0"/>
+          </a:p>
+          <a:p>
+            <a:endParaRPr lang="zh-CN" altLang="en-US" dirty="0"/>
           </a:p>
         </p:txBody>
       </p:sp>
@@ -5217,7 +5159,7 @@
               </a14:hiddenLine>
             </a:ext>
             <a:ext uri="{FAA26D3D-D897-4be2-8F04-BA451C77F1D7}">
-              <ma14:placeholderFlag xmlns="" xmlns:ma14="http://schemas.microsoft.com/office/mac/drawingml/2011/main" val="1"/>
+              <ma14:placeholderFlag xmlns:ma14="http://schemas.microsoft.com/office/mac/drawingml/2011/main" xmlns="" val="1"/>
             </a:ext>
           </a:extLst>
         </p:spPr>
@@ -8913,7 +8855,7 @@
               </a14:hiddenLine>
             </a:ext>
             <a:ext uri="{FAA26D3D-D897-4be2-8F04-BA451C77F1D7}">
-              <ma14:placeholderFlag xmlns="" xmlns:ma14="http://schemas.microsoft.com/office/mac/drawingml/2011/main" val="1"/>
+              <ma14:placeholderFlag xmlns:ma14="http://schemas.microsoft.com/office/mac/drawingml/2011/main" xmlns="" val="1"/>
             </a:ext>
           </a:extLst>
         </p:spPr>
@@ -10389,7 +10331,7 @@
                 <a:latin typeface="微软雅黑"/>
                 <a:ea typeface="微软雅黑"/>
               </a:rPr>
-              <a:t>第六章 面向对象程序设计</a:t>
+              <a:t>第三章 面向对象程序设计</a:t>
             </a:r>
             <a:endParaRPr lang="zh-CN" altLang="zh-CN" sz="4800" b="1" dirty="0">
               <a:solidFill>
@@ -10929,10 +10871,10 @@
                 <a:latin typeface="+mn-ea"/>
                 <a:ea typeface="+mn-ea"/>
               </a:rPr>
-              <a:t>六</a:t>
-            </a:r>
-            <a:r>
-              <a:rPr lang="en-CN" sz="1800" b="1" dirty="0">
+              <a:t>三</a:t>
+            </a:r>
+            <a:r>
+              <a:rPr lang="en-CN" sz="1800" b="1">
                 <a:solidFill>
                   <a:schemeClr val="bg2"/>
                 </a:solidFill>
@@ -10941,6 +10883,13 @@
               </a:rPr>
               <a:t>章</a:t>
             </a:r>
+            <a:endParaRPr lang="en-CN" sz="1800" b="1" dirty="0">
+              <a:solidFill>
+                <a:schemeClr val="bg2"/>
+              </a:solidFill>
+              <a:latin typeface="+mn-ea"/>
+              <a:ea typeface="+mn-ea"/>
+            </a:endParaRPr>
           </a:p>
         </p:txBody>
       </p:sp>
@@ -11100,8 +11049,8 @@
         </p:nvSpPr>
         <p:spPr>
           <a:xfrm>
-            <a:off x="319314" y="1406783"/>
-            <a:ext cx="11676743" cy="2170659"/>
+            <a:off x="254726" y="1406783"/>
+            <a:ext cx="11741331" cy="2170659"/>
           </a:xfrm>
           <a:prstGeom prst="rect">
             <a:avLst/>
@@ -11208,13 +11157,13 @@
           <p:nvPr>
             <p:extLst>
               <p:ext uri="{D42A27DB-BD31-4B8C-83A1-F6EECF244321}">
-                <p14:modId xmlns:p14="http://schemas.microsoft.com/office/powerpoint/2010/main" val="1327094444"/>
+                <p14:modId xmlns:p14="http://schemas.microsoft.com/office/powerpoint/2010/main" val="4260625831"/>
               </p:ext>
             </p:extLst>
           </p:nvPr>
         </p:nvGraphicFramePr>
         <p:xfrm>
-          <a:off x="2024743" y="3599213"/>
+          <a:off x="2024743" y="3631868"/>
           <a:ext cx="9869713" cy="3157635"/>
         </p:xfrm>
         <a:graphic>
@@ -11249,7 +11198,7 @@
                         </a:lnSpc>
                       </a:pPr>
                       <a:r>
-                        <a:rPr lang="zh-CN" altLang="en-US" sz="2400" b="1">
+                        <a:rPr lang="zh-CN" altLang="en-US" sz="2400" b="1" dirty="0">
                           <a:solidFill>
                             <a:schemeClr val="bg2"/>
                           </a:solidFill>
@@ -11312,7 +11261,7 @@
                         </a:lnSpc>
                       </a:pPr>
                       <a:r>
-                        <a:rPr lang="zh-CN" altLang="en-US" sz="2400" b="1">
+                        <a:rPr lang="zh-CN" altLang="en-US" sz="2400" b="1" dirty="0">
                           <a:solidFill>
                             <a:schemeClr val="bg2"/>
                           </a:solidFill>
@@ -11451,7 +11400,7 @@
                         </a:lnSpc>
                       </a:pPr>
                       <a:r>
-                        <a:rPr lang="zh-CN" altLang="en-US" sz="2400">
+                        <a:rPr lang="zh-CN" altLang="en-US" sz="2400" dirty="0">
                           <a:solidFill>
                             <a:schemeClr val="bg2"/>
                           </a:solidFill>
@@ -11660,7 +11609,7 @@
                         </a:lnSpc>
                       </a:pPr>
                       <a:r>
-                        <a:rPr lang="zh-CN" altLang="en-US" sz="2400" b="1">
+                        <a:rPr lang="zh-CN" altLang="en-US" sz="2400" b="1" dirty="0">
                           <a:solidFill>
                             <a:schemeClr val="bg2"/>
                           </a:solidFill>
@@ -11668,7 +11617,7 @@
                         </a:rPr>
                         <a:t>接口统一，易于维护</a:t>
                       </a:r>
-                      <a:endParaRPr lang="zh-CN" altLang="en-US" sz="2400">
+                      <a:endParaRPr lang="zh-CN" altLang="en-US" sz="2400" dirty="0">
                         <a:solidFill>
                           <a:schemeClr val="bg2"/>
                         </a:solidFill>
@@ -11805,8 +11754,8 @@
         </p:nvSpPr>
         <p:spPr>
           <a:xfrm>
-            <a:off x="205015" y="4848389"/>
-            <a:ext cx="2117271" cy="581057"/>
+            <a:off x="104504" y="4848389"/>
+            <a:ext cx="2083526" cy="581057"/>
           </a:xfrm>
           <a:prstGeom prst="rect">
             <a:avLst/>
@@ -13542,14 +13491,24 @@
               </a:lnSpc>
             </a:pPr>
             <a:r>
-              <a:rPr lang="zh-CN" altLang="en-US" dirty="0">
+              <a:rPr lang="zh-CN" altLang="en-US" b="1" dirty="0">
                 <a:solidFill>
                   <a:schemeClr val="bg2"/>
                 </a:solidFill>
                 <a:latin typeface="Microsoft YaHei" panose="020B0503020204020204" pitchFamily="34" charset="-122"/>
                 <a:ea typeface="Microsoft YaHei" panose="020B0503020204020204" pitchFamily="34" charset="-122"/>
               </a:rPr>
-              <a:t>代码复用：避免重复编写相同功能的代码。</a:t>
+              <a:t>代码复用</a:t>
+            </a:r>
+            <a:r>
+              <a:rPr lang="zh-CN" altLang="en-US" dirty="0">
+                <a:solidFill>
+                  <a:schemeClr val="bg2"/>
+                </a:solidFill>
+                <a:latin typeface="Microsoft YaHei" panose="020B0503020204020204" pitchFamily="34" charset="-122"/>
+                <a:ea typeface="Microsoft YaHei" panose="020B0503020204020204" pitchFamily="34" charset="-122"/>
+              </a:rPr>
+              <a:t>：避免重复编写相同功能的代码。</a:t>
             </a:r>
             <a:endParaRPr lang="en-US" altLang="zh-CN" dirty="0">
               <a:solidFill>
@@ -13566,14 +13525,24 @@
               </a:lnSpc>
             </a:pPr>
             <a:r>
-              <a:rPr lang="zh-CN" altLang="en-US" dirty="0">
+              <a:rPr lang="zh-CN" altLang="en-US" b="1" dirty="0">
                 <a:solidFill>
                   <a:schemeClr val="bg2"/>
                 </a:solidFill>
                 <a:latin typeface="Microsoft YaHei" panose="020B0503020204020204" pitchFamily="34" charset="-122"/>
                 <a:ea typeface="Microsoft YaHei" panose="020B0503020204020204" pitchFamily="34" charset="-122"/>
               </a:rPr>
-              <a:t>扩展功能：子类可以添加新方法或覆盖父类方法。</a:t>
+              <a:t>扩展功能</a:t>
+            </a:r>
+            <a:r>
+              <a:rPr lang="zh-CN" altLang="en-US" dirty="0">
+                <a:solidFill>
+                  <a:schemeClr val="bg2"/>
+                </a:solidFill>
+                <a:latin typeface="Microsoft YaHei" panose="020B0503020204020204" pitchFamily="34" charset="-122"/>
+                <a:ea typeface="Microsoft YaHei" panose="020B0503020204020204" pitchFamily="34" charset="-122"/>
+              </a:rPr>
+              <a:t>：子类可以添加新方法或覆盖父类方法。</a:t>
             </a:r>
             <a:endParaRPr lang="en-US" altLang="zh-CN" dirty="0">
               <a:solidFill>
@@ -13590,14 +13559,24 @@
               </a:lnSpc>
             </a:pPr>
             <a:r>
-              <a:rPr lang="zh-CN" altLang="en-US" dirty="0">
+              <a:rPr lang="zh-CN" altLang="en-US" b="1" dirty="0">
                 <a:solidFill>
                   <a:schemeClr val="bg2"/>
                 </a:solidFill>
                 <a:latin typeface="Microsoft YaHei" panose="020B0503020204020204" pitchFamily="34" charset="-122"/>
                 <a:ea typeface="Microsoft YaHei" panose="020B0503020204020204" pitchFamily="34" charset="-122"/>
               </a:rPr>
-              <a:t>逻辑分层：通过</a:t>
+              <a:t>逻辑分层</a:t>
+            </a:r>
+            <a:r>
+              <a:rPr lang="zh-CN" altLang="en-US" dirty="0">
+                <a:solidFill>
+                  <a:schemeClr val="bg2"/>
+                </a:solidFill>
+                <a:latin typeface="Microsoft YaHei" panose="020B0503020204020204" pitchFamily="34" charset="-122"/>
+                <a:ea typeface="Microsoft YaHei" panose="020B0503020204020204" pitchFamily="34" charset="-122"/>
+              </a:rPr>
+              <a:t>：通过</a:t>
             </a:r>
             <a:r>
               <a:rPr lang="zh-CN" altLang="en-US" dirty="0">
@@ -14651,9 +14630,9 @@
               <a:t>使用 </a:t>
             </a:r>
             <a:r>
-              <a:rPr lang="en-US" sz="2800" dirty="0">
-                <a:solidFill>
-                  <a:schemeClr val="bg2"/>
+              <a:rPr lang="en-US" sz="2800" b="1" dirty="0">
+                <a:solidFill>
+                  <a:schemeClr val="accent2"/>
                 </a:solidFill>
                 <a:latin typeface="+mn-ea"/>
                 <a:ea typeface="+mn-ea"/>
@@ -14661,14 +14640,24 @@
               <a:t>super() </a:t>
             </a:r>
             <a:r>
-              <a:rPr lang="zh-CN" altLang="en-US" sz="2800" dirty="0">
-                <a:solidFill>
-                  <a:schemeClr val="bg2"/>
+              <a:rPr lang="zh-CN" altLang="en-US" sz="2800" b="1" dirty="0">
+                <a:solidFill>
+                  <a:schemeClr val="accent2"/>
                 </a:solidFill>
                 <a:latin typeface="+mn-ea"/>
                 <a:ea typeface="+mn-ea"/>
               </a:rPr>
-              <a:t>函数调用父类方法，保留父类功能并扩展子类逻辑。</a:t>
+              <a:t>函数</a:t>
+            </a:r>
+            <a:r>
+              <a:rPr lang="zh-CN" altLang="en-US" sz="2800" dirty="0">
+                <a:solidFill>
+                  <a:schemeClr val="bg2"/>
+                </a:solidFill>
+                <a:latin typeface="+mn-ea"/>
+                <a:ea typeface="+mn-ea"/>
+              </a:rPr>
+              <a:t>调用父类方法，保留父类功能并扩展子类逻辑。</a:t>
             </a:r>
             <a:endParaRPr lang="en-US" altLang="zh-CN" sz="2800" dirty="0">
               <a:solidFill>
@@ -14866,8 +14855,8 @@
         </p:nvSpPr>
         <p:spPr>
           <a:xfrm>
-            <a:off x="581297" y="1571394"/>
-            <a:ext cx="5305697" cy="662554"/>
+            <a:off x="581297" y="1604049"/>
+            <a:ext cx="10861766" cy="662554"/>
           </a:xfrm>
           <a:prstGeom prst="rect">
             <a:avLst/>
@@ -15227,7 +15216,7 @@
                         </a:lnSpc>
                       </a:pPr>
                       <a:r>
-                        <a:rPr lang="zh-CN" altLang="en-US" sz="2800">
+                        <a:rPr lang="zh-CN" altLang="en-US" sz="2800" dirty="0">
                           <a:solidFill>
                             <a:schemeClr val="bg2"/>
                           </a:solidFill>
@@ -18171,7 +18160,7 @@
                 <a:latin typeface="+mn-ea"/>
                 <a:ea typeface="+mn-ea"/>
               </a:rPr>
-              <a:t>第六章实验</a:t>
+              <a:t>课堂实验</a:t>
             </a:r>
             <a:endParaRPr lang="en-US" altLang="zh-CN" sz="3600" b="1" dirty="0">
               <a:solidFill>
@@ -18454,417 +18443,6 @@
     <p:extLst>
       <p:ext uri="{BB962C8B-B14F-4D97-AF65-F5344CB8AC3E}">
         <p14:creationId xmlns:p14="http://schemas.microsoft.com/office/powerpoint/2010/main" val="4207004688"/>
-      </p:ext>
-    </p:extLst>
-  </p:cSld>
-  <p:clrMapOvr>
-    <a:masterClrMapping/>
-  </p:clrMapOvr>
-  <p:transition>
-    <p:fade/>
-  </p:transition>
-</p:sld>
-</file>
-
-<file path=ppt/slides/slide24.xml><?xml version="1.0" encoding="utf-8"?>
-<p:sld xmlns:a="http://schemas.openxmlformats.org/drawingml/2006/main" xmlns:r="http://schemas.openxmlformats.org/officeDocument/2006/relationships" xmlns:p="http://schemas.openxmlformats.org/presentationml/2006/main">
-  <p:cSld>
-    <p:spTree>
-      <p:nvGrpSpPr>
-        <p:cNvPr id="1" name="">
-          <a:extLst>
-            <a:ext uri="{FF2B5EF4-FFF2-40B4-BE49-F238E27FC236}">
-              <a16:creationId xmlns:a16="http://schemas.microsoft.com/office/drawing/2014/main" id="{ABF09DC3-A71F-CF10-E6C4-3A333D520B90}"/>
-            </a:ext>
-          </a:extLst>
-        </p:cNvPr>
-        <p:cNvGrpSpPr/>
-        <p:nvPr/>
-      </p:nvGrpSpPr>
-      <p:grpSpPr>
-        <a:xfrm>
-          <a:off x="0" y="0"/>
-          <a:ext cx="0" cy="0"/>
-          <a:chOff x="0" y="0"/>
-          <a:chExt cx="0" cy="0"/>
-        </a:xfrm>
-      </p:grpSpPr>
-      <p:sp>
-        <p:nvSpPr>
-          <p:cNvPr id="4" name="TextBox 10">
-            <a:extLst>
-              <a:ext uri="{FF2B5EF4-FFF2-40B4-BE49-F238E27FC236}">
-                <a16:creationId xmlns:a16="http://schemas.microsoft.com/office/drawing/2014/main" id="{0460D51F-5FF0-8DAA-3264-66FADD204E85}"/>
-              </a:ext>
-            </a:extLst>
-          </p:cNvPr>
-          <p:cNvSpPr txBox="1"/>
-          <p:nvPr/>
-        </p:nvSpPr>
-        <p:spPr>
-          <a:xfrm>
-            <a:off x="410818" y="832995"/>
-            <a:ext cx="9313753" cy="646331"/>
-          </a:xfrm>
-          <a:prstGeom prst="rect">
-            <a:avLst/>
-          </a:prstGeom>
-          <a:noFill/>
-        </p:spPr>
-        <p:txBody>
-          <a:bodyPr wrap="square" rtlCol="0">
-            <a:spAutoFit/>
-          </a:bodyPr>
-          <a:lstStyle/>
-          <a:p>
-            <a:pPr algn="just">
-              <a:lnSpc>
-                <a:spcPct val="100000"/>
-              </a:lnSpc>
-            </a:pPr>
-            <a:r>
-              <a:rPr lang="zh-CN" altLang="en-US" sz="3600" b="1" dirty="0">
-                <a:solidFill>
-                  <a:srgbClr val="333333"/>
-                </a:solidFill>
-                <a:latin typeface="+mn-ea"/>
-                <a:ea typeface="+mn-ea"/>
-              </a:rPr>
-              <a:t>作业</a:t>
-            </a:r>
-            <a:r>
-              <a:rPr lang="en-US" altLang="zh-CN" sz="3600" b="1" dirty="0">
-                <a:solidFill>
-                  <a:srgbClr val="333333"/>
-                </a:solidFill>
-                <a:latin typeface="+mn-ea"/>
-                <a:ea typeface="+mn-ea"/>
-              </a:rPr>
-              <a:t>2</a:t>
-            </a:r>
-            <a:r>
-              <a:rPr lang="zh-CN" altLang="en-US" sz="3600" b="1" dirty="0">
-                <a:solidFill>
-                  <a:srgbClr val="333333"/>
-                </a:solidFill>
-                <a:latin typeface="+mn-ea"/>
-                <a:ea typeface="+mn-ea"/>
-              </a:rPr>
-              <a:t>：面向对象学生成绩管理程序设计</a:t>
-            </a:r>
-            <a:r>
-              <a:rPr lang="en-CN" sz="3600" b="1" dirty="0">
-                <a:solidFill>
-                  <a:srgbClr val="333333"/>
-                </a:solidFill>
-                <a:latin typeface="+mn-ea"/>
-                <a:ea typeface="+mn-ea"/>
-              </a:rPr>
-              <a:t> </a:t>
-            </a:r>
-            <a:endParaRPr lang="en-US" altLang="zh-CN" sz="3600" b="1" dirty="0">
-              <a:solidFill>
-                <a:srgbClr val="333333"/>
-              </a:solidFill>
-              <a:latin typeface="+mn-ea"/>
-              <a:ea typeface="+mn-ea"/>
-            </a:endParaRPr>
-          </a:p>
-        </p:txBody>
-      </p:sp>
-      <p:sp>
-        <p:nvSpPr>
-          <p:cNvPr id="6" name="TextBox 12">
-            <a:extLst>
-              <a:ext uri="{FF2B5EF4-FFF2-40B4-BE49-F238E27FC236}">
-                <a16:creationId xmlns:a16="http://schemas.microsoft.com/office/drawing/2014/main" id="{AC655DF2-381B-EF2F-E4B4-B255CD2F72DA}"/>
-              </a:ext>
-            </a:extLst>
-          </p:cNvPr>
-          <p:cNvSpPr txBox="1"/>
-          <p:nvPr/>
-        </p:nvSpPr>
-        <p:spPr>
-          <a:xfrm>
-            <a:off x="410818" y="1674409"/>
-            <a:ext cx="11495976" cy="4540217"/>
-          </a:xfrm>
-          <a:prstGeom prst="rect">
-            <a:avLst/>
-          </a:prstGeom>
-          <a:noFill/>
-        </p:spPr>
-        <p:txBody>
-          <a:bodyPr wrap="square">
-            <a:spAutoFit/>
-          </a:bodyPr>
-          <a:lstStyle/>
-          <a:p>
-            <a:pPr algn="just">
-              <a:lnSpc>
-                <a:spcPct val="150000"/>
-              </a:lnSpc>
-            </a:pPr>
-            <a:r>
-              <a:rPr lang="zh-CN" altLang="en-US" sz="3200" b="1" dirty="0">
-                <a:solidFill>
-                  <a:srgbClr val="FF0000"/>
-                </a:solidFill>
-                <a:latin typeface="Times New Roman" panose="02020603050405020304" pitchFamily="18" charset="0"/>
-                <a:ea typeface="+mn-ea"/>
-                <a:cs typeface="Times New Roman" panose="02020603050405020304" pitchFamily="18" charset="0"/>
-              </a:rPr>
-              <a:t>作业内容：</a:t>
-            </a:r>
-            <a:endParaRPr lang="en-US" altLang="zh-CN" sz="3200" b="1" dirty="0">
-              <a:solidFill>
-                <a:srgbClr val="FF0000"/>
-              </a:solidFill>
-              <a:latin typeface="Times New Roman" panose="02020603050405020304" pitchFamily="18" charset="0"/>
-              <a:ea typeface="+mn-ea"/>
-              <a:cs typeface="Times New Roman" panose="02020603050405020304" pitchFamily="18" charset="0"/>
-            </a:endParaRPr>
-          </a:p>
-          <a:p>
-            <a:pPr algn="l"/>
-            <a:r>
-              <a:rPr lang="en-US" sz="2800" dirty="0">
-                <a:solidFill>
-                  <a:schemeClr val="bg2"/>
-                </a:solidFill>
-                <a:latin typeface="Times New Roman" panose="02020603050405020304" pitchFamily="18" charset="0"/>
-                <a:ea typeface="+mn-ea"/>
-                <a:cs typeface="Times New Roman" panose="02020603050405020304" pitchFamily="18" charset="0"/>
-              </a:rPr>
-              <a:t>1. </a:t>
-            </a:r>
-            <a:r>
-              <a:rPr lang="zh-CN" altLang="en-US" sz="2800" dirty="0">
-                <a:solidFill>
-                  <a:schemeClr val="bg2"/>
-                </a:solidFill>
-                <a:latin typeface="Times New Roman" panose="02020603050405020304" pitchFamily="18" charset="0"/>
-                <a:ea typeface="+mn-ea"/>
-                <a:cs typeface="Times New Roman" panose="02020603050405020304" pitchFamily="18" charset="0"/>
-              </a:rPr>
-              <a:t>开发学生课程管理相关类，包含且不限于作业一中功能。</a:t>
-            </a:r>
-            <a:endParaRPr lang="en-CN" sz="2800" dirty="0">
-              <a:solidFill>
-                <a:schemeClr val="bg2"/>
-              </a:solidFill>
-              <a:latin typeface="Times New Roman" panose="02020603050405020304" pitchFamily="18" charset="0"/>
-              <a:ea typeface="+mn-ea"/>
-              <a:cs typeface="Times New Roman" panose="02020603050405020304" pitchFamily="18" charset="0"/>
-            </a:endParaRPr>
-          </a:p>
-          <a:p>
-            <a:pPr algn="l"/>
-            <a:r>
-              <a:rPr lang="en-US" sz="2800" dirty="0">
-                <a:solidFill>
-                  <a:schemeClr val="bg2"/>
-                </a:solidFill>
-                <a:latin typeface="Times New Roman" panose="02020603050405020304" pitchFamily="18" charset="0"/>
-                <a:ea typeface="+mn-ea"/>
-                <a:cs typeface="Times New Roman" panose="02020603050405020304" pitchFamily="18" charset="0"/>
-              </a:rPr>
-              <a:t>2. </a:t>
-            </a:r>
-            <a:r>
-              <a:rPr lang="zh-CN" altLang="en-US" sz="2800" dirty="0">
-                <a:solidFill>
-                  <a:schemeClr val="bg2"/>
-                </a:solidFill>
-                <a:latin typeface="Times New Roman" panose="02020603050405020304" pitchFamily="18" charset="0"/>
-                <a:ea typeface="+mn-ea"/>
-                <a:cs typeface="Times New Roman" panose="02020603050405020304" pitchFamily="18" charset="0"/>
-              </a:rPr>
-              <a:t>通过代码对课程管理类进行演示说明。</a:t>
-            </a:r>
-            <a:endParaRPr lang="en-CN" sz="2800" dirty="0">
-              <a:solidFill>
-                <a:schemeClr val="bg2"/>
-              </a:solidFill>
-              <a:latin typeface="Times New Roman" panose="02020603050405020304" pitchFamily="18" charset="0"/>
-              <a:ea typeface="+mn-ea"/>
-              <a:cs typeface="Times New Roman" panose="02020603050405020304" pitchFamily="18" charset="0"/>
-            </a:endParaRPr>
-          </a:p>
-          <a:p>
-            <a:pPr algn="l"/>
-            <a:r>
-              <a:rPr lang="en-US" sz="2800" dirty="0">
-                <a:solidFill>
-                  <a:schemeClr val="bg2"/>
-                </a:solidFill>
-                <a:latin typeface="Times New Roman" panose="02020603050405020304" pitchFamily="18" charset="0"/>
-                <a:ea typeface="+mn-ea"/>
-                <a:cs typeface="Times New Roman" panose="02020603050405020304" pitchFamily="18" charset="0"/>
-              </a:rPr>
-              <a:t>3. </a:t>
-            </a:r>
-            <a:r>
-              <a:rPr lang="zh-CN" altLang="en-US" sz="2800" dirty="0">
-                <a:solidFill>
-                  <a:schemeClr val="bg2"/>
-                </a:solidFill>
-                <a:latin typeface="Times New Roman" panose="02020603050405020304" pitchFamily="18" charset="0"/>
-                <a:ea typeface="+mn-ea"/>
-                <a:cs typeface="Times New Roman" panose="02020603050405020304" pitchFamily="18" charset="0"/>
-              </a:rPr>
-              <a:t>对比总结面向对象程序设计与面向过程程序设计优劣。</a:t>
-            </a:r>
-            <a:endParaRPr lang="en-US" sz="2800" dirty="0">
-              <a:solidFill>
-                <a:schemeClr val="bg2"/>
-              </a:solidFill>
-              <a:latin typeface="Times New Roman" panose="02020603050405020304" pitchFamily="18" charset="0"/>
-              <a:ea typeface="+mn-ea"/>
-              <a:cs typeface="Times New Roman" panose="02020603050405020304" pitchFamily="18" charset="0"/>
-            </a:endParaRPr>
-          </a:p>
-          <a:p>
-            <a:pPr algn="just">
-              <a:lnSpc>
-                <a:spcPct val="150000"/>
-              </a:lnSpc>
-            </a:pPr>
-            <a:r>
-              <a:rPr lang="zh-CN" altLang="en-US" sz="3200" b="1" dirty="0">
-                <a:solidFill>
-                  <a:srgbClr val="FF0000"/>
-                </a:solidFill>
-                <a:latin typeface="Times New Roman" panose="02020603050405020304" pitchFamily="18" charset="0"/>
-                <a:ea typeface="+mn-ea"/>
-                <a:cs typeface="Times New Roman" panose="02020603050405020304" pitchFamily="18" charset="0"/>
-              </a:rPr>
-              <a:t>实验内容及要求：</a:t>
-            </a:r>
-            <a:endParaRPr lang="en-US" altLang="zh-CN" sz="3200" b="1" dirty="0">
-              <a:solidFill>
-                <a:srgbClr val="FF0000"/>
-              </a:solidFill>
-              <a:latin typeface="Times New Roman" panose="02020603050405020304" pitchFamily="18" charset="0"/>
-              <a:ea typeface="+mn-ea"/>
-              <a:cs typeface="Times New Roman" panose="02020603050405020304" pitchFamily="18" charset="0"/>
-            </a:endParaRPr>
-          </a:p>
-          <a:p>
-            <a:pPr algn="just">
-              <a:lnSpc>
-                <a:spcPct val="150000"/>
-              </a:lnSpc>
-            </a:pPr>
-            <a:r>
-              <a:rPr lang="zh-CN" altLang="en-US" sz="2800" dirty="0">
-                <a:solidFill>
-                  <a:schemeClr val="bg2"/>
-                </a:solidFill>
-                <a:latin typeface="Times New Roman" panose="02020603050405020304" pitchFamily="18" charset="0"/>
-                <a:ea typeface="+mn-ea"/>
-                <a:cs typeface="Times New Roman" panose="02020603050405020304" pitchFamily="18" charset="0"/>
-              </a:rPr>
-              <a:t>作业以</a:t>
-            </a:r>
-            <a:r>
-              <a:rPr lang="en-US" sz="2800" dirty="0">
-                <a:solidFill>
-                  <a:schemeClr val="bg2"/>
-                </a:solidFill>
-                <a:latin typeface="Times New Roman" panose="02020603050405020304" pitchFamily="18" charset="0"/>
-                <a:ea typeface="+mn-ea"/>
-                <a:cs typeface="Times New Roman" panose="02020603050405020304" pitchFamily="18" charset="0"/>
-              </a:rPr>
-              <a:t>pdf</a:t>
-            </a:r>
-            <a:r>
-              <a:rPr lang="zh-CN" altLang="en-US" sz="2800" dirty="0">
-                <a:solidFill>
-                  <a:schemeClr val="bg2"/>
-                </a:solidFill>
-                <a:latin typeface="Times New Roman" panose="02020603050405020304" pitchFamily="18" charset="0"/>
-                <a:ea typeface="+mn-ea"/>
-                <a:cs typeface="Times New Roman" panose="02020603050405020304" pitchFamily="18" charset="0"/>
-              </a:rPr>
-              <a:t>格式提交，要求格式规范、内容准确且细节充分。</a:t>
-            </a:r>
-            <a:r>
-              <a:rPr lang="en-CN" sz="2800" dirty="0">
-                <a:solidFill>
-                  <a:schemeClr val="bg2"/>
-                </a:solidFill>
-                <a:latin typeface="Times New Roman" panose="02020603050405020304" pitchFamily="18" charset="0"/>
-                <a:ea typeface="+mn-ea"/>
-                <a:cs typeface="Times New Roman" panose="02020603050405020304" pitchFamily="18" charset="0"/>
-              </a:rPr>
-              <a:t> </a:t>
-            </a:r>
-            <a:endParaRPr lang="en-US" altLang="zh-CN" sz="2800" dirty="0">
-              <a:solidFill>
-                <a:schemeClr val="bg2"/>
-              </a:solidFill>
-              <a:latin typeface="Times New Roman" panose="02020603050405020304" pitchFamily="18" charset="0"/>
-              <a:ea typeface="+mn-ea"/>
-              <a:cs typeface="Times New Roman" panose="02020603050405020304" pitchFamily="18" charset="0"/>
-            </a:endParaRPr>
-          </a:p>
-        </p:txBody>
-      </p:sp>
-      <p:sp>
-        <p:nvSpPr>
-          <p:cNvPr id="7" name="标题 2">
-            <a:extLst>
-              <a:ext uri="{FF2B5EF4-FFF2-40B4-BE49-F238E27FC236}">
-                <a16:creationId xmlns:a16="http://schemas.microsoft.com/office/drawing/2014/main" id="{E45E95B0-68E0-6FAC-D1F6-6E7B1378F0FB}"/>
-              </a:ext>
-            </a:extLst>
-          </p:cNvPr>
-          <p:cNvSpPr>
-            <a:spLocks noGrp="1"/>
-          </p:cNvSpPr>
-          <p:nvPr>
-            <p:ph type="title"/>
-          </p:nvPr>
-        </p:nvSpPr>
-        <p:spPr>
-          <a:xfrm>
-            <a:off x="1" y="8526"/>
-            <a:ext cx="10537372" cy="792162"/>
-          </a:xfrm>
-        </p:spPr>
-        <p:txBody>
-          <a:bodyPr/>
-          <a:lstStyle/>
-          <a:p>
-            <a:pPr fontAlgn="auto">
-              <a:spcBef>
-                <a:spcPts val="0"/>
-              </a:spcBef>
-              <a:spcAft>
-                <a:spcPts val="0"/>
-              </a:spcAft>
-            </a:pPr>
-            <a:r>
-              <a:rPr lang="zh-CN" altLang="en-US" dirty="0">
-                <a:latin typeface="+mn-ea"/>
-              </a:rPr>
-              <a:t>六、</a:t>
-            </a:r>
-            <a:r>
-              <a:rPr lang="zh-CN" altLang="en-US" dirty="0">
-                <a:latin typeface="微软雅黑" pitchFamily="34" charset="-122"/>
-                <a:ea typeface="微软雅黑" pitchFamily="34" charset="-122"/>
-              </a:rPr>
-              <a:t>面向对象程序设计</a:t>
-            </a:r>
-          </a:p>
-        </p:txBody>
-      </p:sp>
-    </p:spTree>
-    <p:extLst>
-      <p:ext uri="{BB962C8B-B14F-4D97-AF65-F5344CB8AC3E}">
-        <p14:creationId xmlns:p14="http://schemas.microsoft.com/office/powerpoint/2010/main" val="2896619728"/>
       </p:ext>
     </p:extLst>
   </p:cSld>
@@ -20938,7 +20516,7 @@
         <p:spPr>
           <a:xfrm>
             <a:off x="420914" y="902168"/>
-            <a:ext cx="9929421" cy="743986"/>
+            <a:ext cx="3524069" cy="743986"/>
           </a:xfrm>
           <a:prstGeom prst="rect">
             <a:avLst/>
@@ -20990,8 +20568,8 @@
         </p:nvSpPr>
         <p:spPr>
           <a:xfrm>
-            <a:off x="529772" y="1631523"/>
-            <a:ext cx="9027885" cy="662554"/>
+            <a:off x="529773" y="1631523"/>
+            <a:ext cx="8947330" cy="662554"/>
           </a:xfrm>
           <a:prstGeom prst="rect">
             <a:avLst/>
@@ -21076,7 +20654,7 @@
           <p:nvPr>
             <p:extLst>
               <p:ext uri="{D42A27DB-BD31-4B8C-83A1-F6EECF244321}">
-                <p14:modId xmlns:p14="http://schemas.microsoft.com/office/powerpoint/2010/main" val="3970944859"/>
+                <p14:modId xmlns:p14="http://schemas.microsoft.com/office/powerpoint/2010/main" val="72739093"/>
               </p:ext>
             </p:extLst>
           </p:nvPr>
@@ -21726,7 +21304,31 @@
                           <a:ea typeface="+mn-ea"/>
                           <a:cs typeface="+mn-cs"/>
                         </a:rPr>
-                        <a:t>可访问实例和类属性</a:t>
+                        <a:t>可访问实例</a:t>
+                      </a:r>
+                      <a:r>
+                        <a:rPr lang="en-US" altLang="zh-CN" sz="2400" kern="1200" dirty="0">
+                          <a:solidFill>
+                            <a:schemeClr val="bg2"/>
+                          </a:solidFill>
+                          <a:effectLst/>
+                          <a:latin typeface="+mn-ea"/>
+                          <a:ea typeface="+mn-ea"/>
+                          <a:cs typeface="+mn-cs"/>
+                        </a:rPr>
+                        <a:t>/</a:t>
+                      </a:r>
+                      <a:r>
+                        <a:rPr lang="zh-CN" altLang="en-US" sz="2400" kern="1200" dirty="0">
+                          <a:solidFill>
+                            <a:schemeClr val="bg2"/>
+                          </a:solidFill>
+                          <a:effectLst/>
+                          <a:latin typeface="+mn-ea"/>
+                          <a:ea typeface="+mn-ea"/>
+                          <a:cs typeface="+mn-cs"/>
+                        </a:rPr>
+                        <a:t>类属性</a:t>
                       </a:r>
                     </a:p>
                   </a:txBody>
@@ -22480,7 +22082,31 @@
                           <a:ea typeface="+mn-ea"/>
                           <a:cs typeface="+mn-cs"/>
                         </a:rPr>
-                        <a:t>不可访问类或实例属性</a:t>
+                        <a:t>不可访问类</a:t>
+                      </a:r>
+                      <a:r>
+                        <a:rPr lang="en-US" altLang="zh-CN" sz="2400" kern="1200" dirty="0">
+                          <a:solidFill>
+                            <a:schemeClr val="bg2"/>
+                          </a:solidFill>
+                          <a:effectLst/>
+                          <a:latin typeface="+mn-ea"/>
+                          <a:ea typeface="+mn-ea"/>
+                          <a:cs typeface="+mn-cs"/>
+                        </a:rPr>
+                        <a:t>/</a:t>
+                      </a:r>
+                      <a:r>
+                        <a:rPr lang="zh-CN" altLang="en-US" sz="2400" kern="1200" dirty="0">
+                          <a:solidFill>
+                            <a:schemeClr val="bg2"/>
+                          </a:solidFill>
+                          <a:effectLst/>
+                          <a:latin typeface="+mn-ea"/>
+                          <a:ea typeface="+mn-ea"/>
+                          <a:cs typeface="+mn-cs"/>
+                        </a:rPr>
+                        <a:t>实例属性</a:t>
                       </a:r>
                     </a:p>
                   </a:txBody>
